--- a/docs/PACT-pitch.pptx
+++ b/docs/PACT-pitch.pptx
@@ -5539,7 +5539,7 @@
                 </a:solidFill>
                 <a:latin typeface="Arial"/>
               </a:rPr>
-              <a:t>237</a:t>
+              <a:t>252</a:t>
             </a:r>
           </a:p>
         </p:txBody>
@@ -10660,7 +10660,7 @@
                 </a:solidFill>
                 <a:latin typeface="Arial"/>
               </a:rPr>
-              <a:t>237</a:t>
+              <a:t>252</a:t>
             </a:r>
           </a:p>
         </p:txBody>
@@ -10699,7 +10699,7 @@
                 </a:solidFill>
                 <a:latin typeface="Arial"/>
               </a:rPr>
-              <a:t>tests — 185 Python, 52 console</a:t>
+              <a:t>tests — 197 Python, 55 console</a:t>
             </a:r>
           </a:p>
         </p:txBody>
@@ -11283,7 +11283,7 @@
                 </a:solidFill>
                 <a:latin typeface="Arial"/>
               </a:rPr>
-              <a:t>237 tests, green on every push</a:t>
+              <a:t>252 tests, green on every push</a:t>
             </a:r>
           </a:p>
         </p:txBody>

--- a/docs/PACT-pitch.pptx
+++ b/docs/PACT-pitch.pptx
@@ -5539,7 +5539,7 @@
                 </a:solidFill>
                 <a:latin typeface="Arial"/>
               </a:rPr>
-              <a:t>252</a:t>
+              <a:t>253</a:t>
             </a:r>
           </a:p>
         </p:txBody>
@@ -10660,7 +10660,7 @@
                 </a:solidFill>
                 <a:latin typeface="Arial"/>
               </a:rPr>
-              <a:t>252</a:t>
+              <a:t>253</a:t>
             </a:r>
           </a:p>
         </p:txBody>
@@ -10699,7 +10699,7 @@
                 </a:solidFill>
                 <a:latin typeface="Arial"/>
               </a:rPr>
-              <a:t>tests — 197 Python, 55 console</a:t>
+              <a:t>tests — 198 Python, 55 console</a:t>
             </a:r>
           </a:p>
         </p:txBody>
@@ -11283,7 +11283,7 @@
                 </a:solidFill>
                 <a:latin typeface="Arial"/>
               </a:rPr>
-              <a:t>252 tests, green on every push</a:t>
+              <a:t>253 tests, green on every push</a:t>
             </a:r>
           </a:p>
         </p:txBody>

--- a/docs/PACT-pitch.pptx
+++ b/docs/PACT-pitch.pptx
@@ -5539,7 +5539,7 @@
                 </a:solidFill>
                 <a:latin typeface="Arial"/>
               </a:rPr>
-              <a:t>253</a:t>
+              <a:t>255</a:t>
             </a:r>
           </a:p>
         </p:txBody>
@@ -10660,7 +10660,7 @@
                 </a:solidFill>
                 <a:latin typeface="Arial"/>
               </a:rPr>
-              <a:t>253</a:t>
+              <a:t>255</a:t>
             </a:r>
           </a:p>
         </p:txBody>
@@ -10699,7 +10699,7 @@
                 </a:solidFill>
                 <a:latin typeface="Arial"/>
               </a:rPr>
-              <a:t>tests — 198 Python, 55 console</a:t>
+              <a:t>tests — 200 Python, 55 console</a:t>
             </a:r>
           </a:p>
         </p:txBody>
@@ -11283,7 +11283,7 @@
                 </a:solidFill>
                 <a:latin typeface="Arial"/>
               </a:rPr>
-              <a:t>253 tests, green on every push</a:t>
+              <a:t>255 tests, green on every push</a:t>
             </a:r>
           </a:p>
         </p:txBody>

--- a/docs/PACT-pitch.pptx
+++ b/docs/PACT-pitch.pptx
@@ -5539,7 +5539,7 @@
                 </a:solidFill>
                 <a:latin typeface="Arial"/>
               </a:rPr>
-              <a:t>255</a:t>
+              <a:t>259</a:t>
             </a:r>
           </a:p>
         </p:txBody>
@@ -10660,7 +10660,7 @@
                 </a:solidFill>
                 <a:latin typeface="Arial"/>
               </a:rPr>
-              <a:t>255</a:t>
+              <a:t>259</a:t>
             </a:r>
           </a:p>
         </p:txBody>
@@ -10699,7 +10699,7 @@
                 </a:solidFill>
                 <a:latin typeface="Arial"/>
               </a:rPr>
-              <a:t>tests — 200 Python, 55 console</a:t>
+              <a:t>tests — 204 Python, 55 console</a:t>
             </a:r>
           </a:p>
         </p:txBody>
@@ -11283,7 +11283,7 @@
                 </a:solidFill>
                 <a:latin typeface="Arial"/>
               </a:rPr>
-              <a:t>255 tests, green on every push</a:t>
+              <a:t>259 tests, green on every push</a:t>
             </a:r>
           </a:p>
         </p:txBody>

--- a/docs/PACT-pitch.pptx
+++ b/docs/PACT-pitch.pptx
@@ -5539,7 +5539,7 @@
                 </a:solidFill>
                 <a:latin typeface="Arial"/>
               </a:rPr>
-              <a:t>259</a:t>
+              <a:t>261</a:t>
             </a:r>
           </a:p>
         </p:txBody>
@@ -10660,7 +10660,7 @@
                 </a:solidFill>
                 <a:latin typeface="Arial"/>
               </a:rPr>
-              <a:t>259</a:t>
+              <a:t>261</a:t>
             </a:r>
           </a:p>
         </p:txBody>
@@ -10699,7 +10699,7 @@
                 </a:solidFill>
                 <a:latin typeface="Arial"/>
               </a:rPr>
-              <a:t>tests — 204 Python, 55 console</a:t>
+              <a:t>tests — 206 Python, 55 console</a:t>
             </a:r>
           </a:p>
         </p:txBody>
@@ -11283,7 +11283,7 @@
                 </a:solidFill>
                 <a:latin typeface="Arial"/>
               </a:rPr>
-              <a:t>259 tests, green on every push</a:t>
+              <a:t>261 tests, green on every push</a:t>
             </a:r>
           </a:p>
         </p:txBody>

--- a/docs/PACT-pitch.pptx
+++ b/docs/PACT-pitch.pptx
@@ -5539,7 +5539,7 @@
                 </a:solidFill>
                 <a:latin typeface="Arial"/>
               </a:rPr>
-              <a:t>261</a:t>
+              <a:t>268</a:t>
             </a:r>
           </a:p>
         </p:txBody>
@@ -10660,7 +10660,7 @@
                 </a:solidFill>
                 <a:latin typeface="Arial"/>
               </a:rPr>
-              <a:t>261</a:t>
+              <a:t>268</a:t>
             </a:r>
           </a:p>
         </p:txBody>
@@ -10699,7 +10699,7 @@
                 </a:solidFill>
                 <a:latin typeface="Arial"/>
               </a:rPr>
-              <a:t>tests — 206 Python, 55 console</a:t>
+              <a:t>tests — 213 Python, 55 console</a:t>
             </a:r>
           </a:p>
         </p:txBody>
@@ -11283,7 +11283,7 @@
                 </a:solidFill>
                 <a:latin typeface="Arial"/>
               </a:rPr>
-              <a:t>261 tests, green on every push</a:t>
+              <a:t>268 tests, green on every push</a:t>
             </a:r>
           </a:p>
         </p:txBody>

--- a/docs/PACT-pitch.pptx
+++ b/docs/PACT-pitch.pptx
@@ -5539,7 +5539,7 @@
                 </a:solidFill>
                 <a:latin typeface="Arial"/>
               </a:rPr>
-              <a:t>268</a:t>
+              <a:t>269</a:t>
             </a:r>
           </a:p>
         </p:txBody>
@@ -10660,7 +10660,7 @@
                 </a:solidFill>
                 <a:latin typeface="Arial"/>
               </a:rPr>
-              <a:t>268</a:t>
+              <a:t>269</a:t>
             </a:r>
           </a:p>
         </p:txBody>
@@ -10699,7 +10699,7 @@
                 </a:solidFill>
                 <a:latin typeface="Arial"/>
               </a:rPr>
-              <a:t>tests — 213 Python, 55 console</a:t>
+              <a:t>tests — 214 Python, 55 console</a:t>
             </a:r>
           </a:p>
         </p:txBody>
@@ -11283,7 +11283,7 @@
                 </a:solidFill>
                 <a:latin typeface="Arial"/>
               </a:rPr>
-              <a:t>268 tests, green on every push</a:t>
+              <a:t>269 tests, green on every push</a:t>
             </a:r>
           </a:p>
         </p:txBody>
